--- a/level4/slides/Level4_Lesson13_Slides.pptx
+++ b/level4/slides/Level4_Lesson13_Slides.pptx
@@ -1181,7 +1181,7 @@
           </a:p>
           <a:p>
             <a:r>
-              <a:t>No speaker? Read the script with a volunteer at a natural, friendly speed, two times. Say gonna and wanna where the script has them.</a:t>
+              <a:t>No speaker? Read the script with a volunteer at a natural, friendly speed, two times. The script says going to and want to. People often say gonna and wanna; learners only need to recognize those words.</a:t>
             </a:r>
           </a:p>
           <a:p>
@@ -1231,7 +1231,7 @@
           </a:p>
           <a:p>
             <a:r>
-              <a:t>Mariana: What's next? After I finish Level 5, I'm gonna take a training class to be a front desk manager. My advice to you is simple: come to class, and don't be afraid to make mistakes. Thank you.</a:t>
+              <a:t>Mariana: What's next? After I finish Level 5, I'm going to take a training class to be a front desk manager. My advice to you is simple: come to class, and don't be afraid to make mistakes. Thank you.</a:t>
             </a:r>
           </a:p>
           <a:p>
@@ -1586,12 +1586,12 @@
           <a:lstStyle/>
           <a:p>
             <a:r>
-              <a:t>"Hear it, say it" (3 min): Point to the script line. gonna = going to: "I'm gonna take a training class." Then practice the pause at the comma: When I started, (pause) I couldn't understand the bus driver. Stress the key words: NOW I can…, NEXT… The class repeats the two lines twice.</a:t>
-            </a:r>
-          </a:p>
-          <a:p>
-            <a:r>
-              <a:t>Reductions: the listening has gonna. Learners need to understand it; they can always say going to.</a:t>
+              <a:t>"Hear it, say it" (3 min): Point to the script line. gonna = going to: "I'm going to take a training class." Then practice the pause at the comma: When I started, (pause) I couldn't understand the bus driver. Stress the key words: NOW I can…, NEXT… The class repeats the two lines twice.</a:t>
+            </a:r>
+          </a:p>
+          <a:p>
+            <a:r>
+              <a:t>Reductions: the listening says going to. People often say gonna. Learners only need to recognize it.</a:t>
             </a:r>
           </a:p>
           <a:p>
@@ -16497,6 +16497,17 @@
               <a:buNone/>
             </a:pPr>
             <a:r>
+              <a:rPr lang="en-US" sz="2000" dirty="0" b="1">
+                <a:solidFill>
+                  <a:srgbClr val="5B3FC4"/>
+                </a:solidFill>
+                <a:latin typeface="Lexend Deca" pitchFamily="34" charset="0"/>
+                <a:ea typeface="Lexend Deca" pitchFamily="34" charset="-122"/>
+                <a:cs typeface="Lexend Deca" pitchFamily="34" charset="-120"/>
+              </a:rPr>
+              <a:t>gonna</a:t>
+            </a:r>
+            <a:r>
               <a:rPr lang="en-US" sz="2000" dirty="0">
                 <a:solidFill>
                   <a:srgbClr val="1B2236"/>
@@ -16505,7 +16516,7 @@
                 <a:ea typeface="Lexend Deca" pitchFamily="34" charset="-122"/>
                 <a:cs typeface="Lexend Deca" pitchFamily="34" charset="-120"/>
               </a:rPr>
-              <a:t>You will hear </a:t>
+              <a:t> is a short form. This listening says </a:t>
             </a:r>
             <a:r>
               <a:rPr lang="en-US" sz="2000" dirty="0" b="1">
@@ -16516,7 +16527,7 @@
                 <a:ea typeface="Lexend Deca" pitchFamily="34" charset="-122"/>
                 <a:cs typeface="Lexend Deca" pitchFamily="34" charset="-120"/>
               </a:rPr>
-              <a:t>gonna</a:t>
+              <a:t>going to</a:t>
             </a:r>
             <a:r>
               <a:rPr lang="en-US" sz="2000" dirty="0">
@@ -16671,7 +16682,7 @@
                 <a:ea typeface="Lexend Deca" pitchFamily="34" charset="-122"/>
                 <a:cs typeface="Lexend Deca" pitchFamily="34" charset="-120"/>
               </a:rPr>
-              <a:t>gonna</a:t>
+              <a:t>going to</a:t>
             </a:r>
             <a:r>
               <a:rPr lang="en-US" sz="1800" dirty="0" b="1">

--- a/level4/slides/Level4_Lesson13_Slides.pptx
+++ b/level4/slides/Level4_Lesson13_Slides.pptx
@@ -1176,7 +1176,7 @@
           </a:p>
           <a:p>
             <a:r>
-              <a:t>The audio (about 1:54) is coming soon. When it is ready, it plays the conversation once; press play again for play 2. Until then, read the listening script (at the end of these notes) with a volunteer.</a:t>
+              <a:t>The audio (L4_L13_listening.mp3, about 1:54) plays the conversation once. Press play again for play 2. A third play is fine if the class needs it.</a:t>
             </a:r>
           </a:p>
           <a:p>
@@ -1186,7 +1186,7 @@
           </a:p>
           <a:p>
             <a:r>
-              <a:t>Audio: the listening audio for this lesson (about 1:54) is coming soon. It will use computer-generated voices (Chatterbox TTS cloned from synthetic Kokoro-82M reference clips); no recordings of real people. Until it is ready, read the listening script (in the notes of the Before You Listen slide) with a volunteer. The names and the story are invented.</a:t>
+              <a:t>Audio: synthetic voices, computer-generated (Chatterbox TTS cloned from Kokoro-82M reference clips). No recordings of real people. The names and the story are invented.</a:t>
             </a:r>
           </a:p>
           <a:p>
@@ -1197,81 +1197,6 @@
           <a:p>
             <a:r>
               <a:t>Picture: Twemoji graphics by Twitter, Inc. and other contributors (https://github.com/jdecked/twemoji), CC BY 4.0 (https://creativecommons.org/licenses/by/4.0/); resized and combined, with signs and labels (images/CREDITS.md).</a:t>
-            </a:r>
-          </a:p>
-          <a:p>
-            <a:r>
-              <a:t>Listening script (the audio is coming soon; until then, read it aloud with a volunteer at a normal, friendly speed):</a:t>
-            </a:r>
-          </a:p>
-          <a:p>
-            <a:r>
-              <a:t>Narrator: Lesson thirteen. Mariana was a learner at this school. Now she is giving a short talk at graduation. Then her old teacher, Mr. Hill, asks her two questions.</a:t>
-            </a:r>
-          </a:p>
-          <a:p>
-            <a:r>
-              <a:t>Mariana: Good evening, everyone. My name is Mariana. When I started English classes here, I couldn't understand the bus driver, and I was afraid to talk on the phone.</a:t>
-            </a:r>
-          </a:p>
-          <a:p>
-            <a:r>
-              <a:t>Mariana: The first year was hard. I was working at a restaurant at night, and I was always tired. But my classmates helped me, and I made friends.</a:t>
-            </a:r>
-          </a:p>
-          <a:p>
-            <a:r>
-              <a:t>Mariana: After I finished Level 2, I got a new job at a hotel. Before I started that job, I practiced my interview with my teacher. Last year, I was able to call the clinic by myself for the first time. That was a big milestone for me.</a:t>
-            </a:r>
-          </a:p>
-          <a:p>
-            <a:r>
-              <a:t>Mariana: Now I can talk to guests at work, and I help my kids with their homework. I'm more confident.</a:t>
-            </a:r>
-          </a:p>
-          <a:p>
-            <a:r>
-              <a:t>Mariana: What's next? After I finish Level 5, I'm going to take a training class to be a front desk manager. My advice to you is simple: come to class, and don't be afraid to make mistakes. Thank you.</a:t>
-            </a:r>
-          </a:p>
-          <a:p>
-            <a:r>
-              <a:t>Mr. Hill: Thank you, Mariana. That was wonderful. Can I ask you two questions?</a:t>
-            </a:r>
-          </a:p>
-          <a:p>
-            <a:r>
-              <a:t>Mariana: Of course.</a:t>
-            </a:r>
-          </a:p>
-          <a:p>
-            <a:r>
-              <a:t>Mr. Hill: What was the biggest challenge for you?</a:t>
-            </a:r>
-          </a:p>
-          <a:p>
-            <a:r>
-              <a:t>Mariana: Getting used to the phone. When I called someone, I couldn't understand them very well. Now it's easy for me.</a:t>
-            </a:r>
-          </a:p>
-          <a:p>
-            <a:r>
-              <a:t>Mr. Hill: And what helped you the most?</a:t>
-            </a:r>
-          </a:p>
-          <a:p>
-            <a:r>
-              <a:t>Mariana: My classmates. When I was tired, they supported me. After class ended, we often studied together. And we celebrated every small success.</a:t>
-            </a:r>
-          </a:p>
-          <a:p>
-            <a:r>
-              <a:t>Mr. Hill: Thank you. Everyone, let's celebrate Mariana!</a:t>
-            </a:r>
-          </a:p>
-          <a:p>
-            <a:r>
-              <a:t>Narrator: That's the end of the listening.</a:t>
             </a:r>
           </a:p>
         </p:txBody>
@@ -2761,7 +2686,7 @@
           </a:p>
           <a:p>
             <a:r>
-              <a:t>Audio: the listening audio for this lesson (about 1:54) is coming soon. It will use computer-generated voices (Chatterbox TTS cloned from synthetic Kokoro-82M reference clips); no recordings of real people. Until it is ready, read the listening script (in the notes of the Before You Listen slide) with a volunteer. The names and the story are invented.</a:t>
+              <a:t>Audio: synthetic voices, computer-generated (Chatterbox TTS cloned from Kokoro-82M reference clips). No recordings of real people. The names and the story are invented.</a:t>
             </a:r>
           </a:p>
           <a:p>
@@ -12059,7 +11984,7 @@
                 <a:ea typeface="Lexend Deca" pitchFamily="34" charset="-122"/>
                 <a:cs typeface="Lexend Deca" pitchFamily="34" charset="-120"/>
               </a:rPr>
-              <a:t>Audio (about 1:54): coming soon.</a:t>
+              <a:t>Audio: about 1:54. It plays once.</a:t>
             </a:r>
             <a:endParaRPr lang="en-US" sz="2200" dirty="0"/>
           </a:p>
@@ -31037,7 +30962,7 @@
                 <a:ea typeface="Lexend Deca" pitchFamily="34" charset="-122"/>
                 <a:cs typeface="Lexend Deca" pitchFamily="34" charset="-120"/>
               </a:rPr>
-              <a:t>Audio (coming soon): synthetic voices made with Chatterbox TTS (MIT License), cloned from short synthetic reference clips made with Kokoro-82M (Apache License 2.0). No recordings of real people. Each file will carry an inaudible Perth watermark marking it as AI-generated. Font: Lexend Deca (OFL 1.1).</a:t>
+              <a:t>Audio: synthetic voices made with Chatterbox TTS (MIT License), cloned from short synthetic reference clips made with Kokoro-82M (Apache License 2.0). No recordings of real people were used. Each file carries an inaudible Perth watermark marking it as AI-generated. Font: Lexend Deca (OFL 1.1).</a:t>
             </a:r>
             <a:endParaRPr lang="en-US" sz="1350" dirty="0" b="0"/>
           </a:p>

--- a/level4/slides/Level4_Lesson13_Slides.pptx
+++ b/level4/slides/Level4_Lesson13_Slides.pptx
@@ -1517,6 +1517,11 @@
           <a:p>
             <a:r>
               <a:t>Reductions: the listening says going to. People often say gonna. Learners only need to recognize it.</a:t>
+            </a:r>
+          </a:p>
+          <a:p>
+            <a:r>
+              <a:t>Everyday English: people often say gonna (going to) and wanna (want to). Learners will hear them often. They are fine in casual talk; in writing, at a job interview, or in a formal email, use going to and want to. The listening uses the full forms.</a:t>
             </a:r>
           </a:p>
           <a:p>
@@ -16441,7 +16446,7 @@
                 <a:ea typeface="Lexend Deca" pitchFamily="34" charset="-122"/>
                 <a:cs typeface="Lexend Deca" pitchFamily="34" charset="-120"/>
               </a:rPr>
-              <a:t> is a short form. This listening says </a:t>
+              <a:t> = going to, </a:t>
             </a:r>
             <a:r>
               <a:rPr lang="en-US" sz="2000" dirty="0" b="1">
@@ -16452,7 +16457,7 @@
                 <a:ea typeface="Lexend Deca" pitchFamily="34" charset="-122"/>
                 <a:cs typeface="Lexend Deca" pitchFamily="34" charset="-120"/>
               </a:rPr>
-              <a:t>going to</a:t>
+              <a:t>wanna</a:t>
             </a:r>
             <a:r>
               <a:rPr lang="en-US" sz="2000" dirty="0">
@@ -16463,7 +16468,7 @@
                 <a:ea typeface="Lexend Deca" pitchFamily="34" charset="-122"/>
                 <a:cs typeface="Lexend Deca" pitchFamily="34" charset="-120"/>
               </a:rPr>
-              <a:t>.</a:t>
+              <a:t> = want to: fine in everyday talk.</a:t>
             </a:r>
             <a:endParaRPr lang="en-US" sz="2000" dirty="0"/>
           </a:p>
